--- a/A2/2607A2.広報室様_有料広告報告書.pptx
+++ b/A2/2607A2.広報室様_有料広告報告書.pptx
@@ -22721,7 +22721,7 @@
               <a:rPr sz="1700" b="0">
                 <a:latin typeface="Arial"/>
               </a:rPr>
-              <a:t>資料請求のCVが一番多い傾向は変わっていません。当月は資料請求が最多で、次いで体験申込という順番でした。前月は体験申込が最も多かったため、7月は資料請求が再び最多となっています。CV種類の総量は夏期講習募集のピークを越えて落ち着いた動きです。</a:t>
+              <a:t>CVはqubo経由が最も多い傾向は変わっていません。当月はqubo経由が34件で最多、次いで体験学習24件、資料請求17件でした。前月（qubo経由68件）からは夏期講習募集ピークの反動で件数が落ち着きましたが、昨年同月とほぼ同水準です。引き続き各CV導線のバランスを見ながら獲得を進めていきます。</a:t>
             </a:r>
             <a:endParaRPr b="0" i="0" sz="1700" u="none" cap="none" strike="noStrike">
               <a:solidFill>
@@ -24039,7 +24039,7 @@
                 </a:solidFill>
                 <a:latin typeface="Arial"/>
               </a:rPr>
-              <a:t>中萬学院系のCVは引き続き多く獲得されています。Google・Yahoo!ともに「中萬学院」系キーワードからの獲得が中心で、指名検索はほぼ取りこぼしなく獲得できています。中高一貫は中高一貫校生塾で1件のCVを獲得しました。引き続きCV獲得実績のあるキーワードを中心に展開を継続していきます。</a:t>
+              <a:t>中萬学院系のCVは引き続き多く獲得されています。Google・Yahoo!ともに「中萬学院」系キーワードからの獲得が中心で、指名検索はほぼ取りこぼしなく獲得できています。中高一貫は1件のCVを獲得しました。引き続きCV獲得実績のあるキーワードを中心に展開を継続していきます。</a:t>
             </a:r>
             <a:endParaRPr b="0" i="0" sz="1700" u="none" cap="none" strike="noStrike">
               <a:solidFill>
